--- a/iBEC_Submission/build_v2/AnalyzingDisorder/28-AnalyzingDisorder-TechnicalAbstract.pptx
+++ b/iBEC_Submission/build_v2/AnalyzingDisorder/28-AnalyzingDisorder-TechnicalAbstract.pptx
@@ -3698,7 +3698,7 @@
               </a:defRPr>
             </a:pPr>
             <a:r>
-              <a:t>•  Frozen ECLS benchmark and 449-artifact release lineage</a:t>
+              <a:t>•  Frozen ECLS benchmark and 68-file checksummed evidence manifest</a:t>
             </a:r>
           </a:p>
         </p:txBody>
@@ -5228,7 +5228,7 @@
               </a:defRPr>
             </a:pPr>
             <a:r>
-              <a:t>Structure → generation → multi-state scoring → filtering → validation → handoff</a:t>
+              <a:t>Structure → generation → multi-state scoring → filtering → triage → handoff</a:t>
             </a:r>
           </a:p>
         </p:txBody>
@@ -6383,7 +6383,7 @@
               </a:defRPr>
             </a:pPr>
             <a:r>
-              <a:t>•  481 source memberships → 352 unique hypotheses</a:t>
+              <a:t>•  481 source memberships → 352 unique candidates including native</a:t>
             </a:r>
           </a:p>
         </p:txBody>
@@ -6803,7 +6803,7 @@
               </a:defRPr>
             </a:pPr>
             <a:r>
-              <a:t>6. Multi-Seed Structural Validation</a:t>
+              <a:t>6. Multi-Seed Structural Triage</a:t>
             </a:r>
           </a:p>
         </p:txBody>
@@ -7619,7 +7619,7 @@
               </a:defRPr>
             </a:pPr>
             <a:r>
-              <a:t>•  Tau/5MP3: correct 13-aa H3, five poses, 275 unique hypotheses, 163 pass all gates</a:t>
+              <a:t>•  Tau/5MP3: correct 13-aa H3, five poses, 275 candidates including native</a:t>
             </a:r>
           </a:p>
         </p:txBody>

--- a/iBEC_Submission/build_v2/AnalyzingDisorder/28-AnalyzingDisorder-TechnicalAbstract.pptx
+++ b/iBEC_Submission/build_v2/AnalyzingDisorder/28-AnalyzingDisorder-TechnicalAbstract.pptx
@@ -3323,7 +3323,7 @@
               </a:defRPr>
             </a:pPr>
             <a:r>
-              <a:t>AI-driven Life Science Discovery | iBEC 2026</a:t>
+              <a:t>Bioinformatics Resources / Platforms | iBEC 2026</a:t>
             </a:r>
           </a:p>
         </p:txBody>
@@ -3536,7 +3536,7 @@
               </a:defRPr>
             </a:pPr>
             <a:r>
-              <a:t>Primary track: AI-driven Life Science Discovery</a:t>
+              <a:t>Primary track: Bioinformatics Resources / Platforms</a:t>
             </a:r>
           </a:p>
         </p:txBody>
